--- a/docs/factorio_user_guide_2026-07-06_en.pptx
+++ b/docs/factorio_user_guide_2026-07-06_en.pptx
@@ -21,6 +21,9 @@
     <p:sldId id="269" r:id="rId20"/>
     <p:sldId id="270" r:id="rId21"/>
     <p:sldId id="271" r:id="rId22"/>
+    <p:sldId id="272" r:id="rId23"/>
+    <p:sldId id="273" r:id="rId24"/>
+    <p:sldId id="274" r:id="rId25"/>
   </p:sldIdLst>
   <p:sldSz cx="12191695" cy="6858000" type="screen4x3"/>
   <p:notesSz cx="6858000" cy="9144000"/>
@@ -3290,7 +3293,7 @@
                   <a:srgbClr val="C8A24B"/>
                 </a:solidFill>
               </a:rPr>
-              <a:t>INVESTOR APP · INVOICE DETAIL</a:t>
+              <a:t>CONTACT</a:t>
             </a:r>
           </a:p>
         </p:txBody>
@@ -3342,7 +3345,7 @@
                   <a:srgbClr val="FFFFFF"/>
                 </a:solidFill>
               </a:rPr>
-              <a:t>   Full transparency before you invest</a:t>
+              <a:t>   Get in touch</a:t>
             </a:r>
           </a:p>
         </p:txBody>
@@ -3380,7 +3383,7 @@
                   <a:srgbClr val="14231B"/>
                 </a:solidFill>
               </a:rPr>
-              <a:t>•  The headline shows the debtor, risk grade, sector and invoice number.</a:t>
+              <a:t>•  A contact page for sellers and investors to reach the Factorio team.</a:t>
             </a:r>
           </a:p>
           <a:p>
@@ -3395,7 +3398,7 @@
                   <a:srgbClr val="14231B"/>
                 </a:solidFill>
               </a:rPr>
-              <a:t>•  A funding panel: amount raised vs goal, advance rate, fee and estimated return.</a:t>
+              <a:t>•  Shows the contact email and a simple enquiry form.</a:t>
             </a:r>
           </a:p>
           <a:p>
@@ -3410,29 +3413,14 @@
                   <a:srgbClr val="14231B"/>
                 </a:solidFill>
               </a:rPr>
-              <a:t>•  A debtor-company profile lists registration number, sector, country and annual turnover.</a:t>
-            </a:r>
-          </a:p>
-          <a:p>
-            <a:pPr>
-              <a:spcAft>
-                <a:spcPts val="1000"/>
-              </a:spcAft>
-            </a:pPr>
-            <a:r>
-              <a:rPr sz="1500">
-                <a:solidFill>
-                  <a:srgbClr val="14231B"/>
-                </a:solidFill>
-              </a:rPr>
-              <a:t>•  Everything needed to make a funding decision on a single screen.</a:t>
+              <a:t>•  The entry point to start onboarding.</a:t>
             </a:r>
           </a:p>
         </p:txBody>
       </p:sp>
       <p:pic>
         <p:nvPicPr>
-          <p:cNvPr id="6" name="Picture 5" descr="en-09-marketplace-detail.png"/>
+          <p:cNvPr id="6" name="Picture 5" descr="en-06-contact.png"/>
           <p:cNvPicPr>
             <a:picLocks noChangeAspect="1"/>
           </p:cNvPicPr>
@@ -3544,7 +3532,7 @@
                   <a:srgbClr val="C8A24B"/>
                 </a:solidFill>
               </a:rPr>
-              <a:t>INVESTOR APP · PORTFOLIO</a:t>
+              <a:t>INVESTOR APP · DASHBOARD</a:t>
             </a:r>
           </a:p>
         </p:txBody>
@@ -3596,7 +3584,7 @@
                   <a:srgbClr val="FFFFFF"/>
                 </a:solidFill>
               </a:rPr>
-              <a:t>   The reporting cockpit</a:t>
+              <a:t>   Your personalized overview</a:t>
             </a:r>
           </a:p>
         </p:txBody>
@@ -3634,7 +3622,7 @@
                   <a:srgbClr val="14231B"/>
                 </a:solidFill>
               </a:rPr>
-              <a:t>•  Two hero panels: net annual return (interest received, write-offs, net income) and account value (active invested, expected outstanding, realized).</a:t>
+              <a:t>•  The /app home greets the current investor and leads with their own KPIs: portfolio value, net annual return, earned-to-date and the next settlement.</a:t>
             </a:r>
           </a:p>
           <a:p>
@@ -3649,7 +3637,7 @@
                   <a:srgbClr val="14231B"/>
                 </a:solidFill>
               </a:rPr>
-              <a:t>•  An investments aging table buckets active positions by days to / past due.</a:t>
+              <a:t>•  A recent-activity feed surfaces notifications — fundings, settlements and updates.</a:t>
             </a:r>
           </a:p>
           <a:p>
@@ -3664,7 +3652,7 @@
                   <a:srgbClr val="14231B"/>
                 </a:solidFill>
               </a:rPr>
-              <a:t>•  A payment-habits table shows how settled invoices actually paid — early, on time, late or written off.</a:t>
+              <a:t>•  Quick actions jump to the marketplace, portfolio and statement.</a:t>
             </a:r>
           </a:p>
           <a:p>
@@ -3679,14 +3667,29 @@
                   <a:srgbClr val="14231B"/>
                 </a:solidFill>
               </a:rPr>
-              <a:t>•  A positions table lists every investment with realized return, settlement date, grade and status.</a:t>
+              <a:t>•  Platform-wide stats are kept as a secondary strip.</a:t>
+            </a:r>
+          </a:p>
+          <a:p>
+            <a:pPr>
+              <a:spcAft>
+                <a:spcPts val="1000"/>
+              </a:spcAft>
+            </a:pPr>
+            <a:r>
+              <a:rPr sz="1500">
+                <a:solidFill>
+                  <a:srgbClr val="14231B"/>
+                </a:solidFill>
+              </a:rPr>
+              <a:t>•  Top-right investor switcher lets you view the app as any investor (demo, no password).</a:t>
             </a:r>
           </a:p>
         </p:txBody>
       </p:sp>
       <p:pic>
         <p:nvPicPr>
-          <p:cNvPr id="6" name="Picture 5" descr="en-10-portfolio.png"/>
+          <p:cNvPr id="6" name="Picture 5" descr="en-07-dashboard.png"/>
           <p:cNvPicPr>
             <a:picLocks noChangeAspect="1"/>
           </p:cNvPicPr>
@@ -3798,7 +3801,7 @@
                   <a:srgbClr val="C8A24B"/>
                 </a:solidFill>
               </a:rPr>
-              <a:t>INVESTOR APP · ACCOUNT STATEMENT</a:t>
+              <a:t>INVESTOR APP · MARKETPLACE</a:t>
             </a:r>
           </a:p>
         </p:txBody>
@@ -3850,7 +3853,7 @@
                   <a:srgbClr val="FFFFFF"/>
                 </a:solidFill>
               </a:rPr>
-              <a:t>   Every transaction, filterable</a:t>
+              <a:t>   Browse fundable invoices</a:t>
             </a:r>
           </a:p>
         </p:txBody>
@@ -3888,7 +3891,7 @@
                   <a:srgbClr val="14231B"/>
                 </a:solidFill>
               </a:rPr>
-              <a:t>•  A unified ledger of cash movements: investments out (−) and settlements in (+).</a:t>
+              <a:t>•  Every open, fundable invoice is a card: debtor, sector, risk grade, amount and a live funding-progress bar.</a:t>
             </a:r>
           </a:p>
           <a:p>
@@ -3903,7 +3906,7 @@
                   <a:srgbClr val="14231B"/>
                 </a:solidFill>
               </a:rPr>
-              <a:t>•  Filter by date range, type, counterparty, invoice number and minimum amount.</a:t>
+              <a:t>•  Each card shows the key economics — advance rate, fee per 30 days and estimated return — plus the target hold in days.</a:t>
             </a:r>
           </a:p>
           <a:p>
@@ -3918,7 +3921,7 @@
                   <a:srgbClr val="14231B"/>
                 </a:solidFill>
               </a:rPr>
-              <a:t>•  Signed amounts in UZS, newest first.</a:t>
+              <a:t>•  The filter bar narrows by sector, risk grade, maximum term and minimum return.</a:t>
             </a:r>
           </a:p>
           <a:p>
@@ -3933,14 +3936,14 @@
                   <a:srgbClr val="14231B"/>
                 </a:solidFill>
               </a:rPr>
-              <a:t>•  One-click CSV export for bookkeeping and reconciliation.</a:t>
+              <a:t>•  Click a card to open the full invoice detail.</a:t>
             </a:r>
           </a:p>
         </p:txBody>
       </p:sp>
       <p:pic>
         <p:nvPicPr>
-          <p:cNvPr id="6" name="Picture 5" descr="en-11-statement.png"/>
+          <p:cNvPr id="6" name="Picture 5" descr="en-08-marketplace.png"/>
           <p:cNvPicPr>
             <a:picLocks noChangeAspect="1"/>
           </p:cNvPicPr>
@@ -4052,7 +4055,7 @@
                   <a:srgbClr val="C8A24B"/>
                 </a:solidFill>
               </a:rPr>
-              <a:t>INVESTOR APP · AUTO-INVEST</a:t>
+              <a:t>INVESTOR APP · INVOICE DETAIL</a:t>
             </a:r>
           </a:p>
         </p:txBody>
@@ -4104,7 +4107,7 @@
                   <a:srgbClr val="FFFFFF"/>
                 </a:solidFill>
               </a:rPr>
-              <a:t>   Set rules, invest automatically</a:t>
+              <a:t>   Full transparency before you invest</a:t>
             </a:r>
           </a:p>
         </p:txBody>
@@ -4142,7 +4145,7 @@
                   <a:srgbClr val="14231B"/>
                 </a:solidFill>
               </a:rPr>
-              <a:t>•  Configure automated bidding: minimum risk grade, maximum amount per invoice and preferred sectors.</a:t>
+              <a:t>•  The headline shows the debtor, risk grade, sector and invoice number.</a:t>
             </a:r>
           </a:p>
           <a:p>
@@ -4157,7 +4160,7 @@
                   <a:srgbClr val="14231B"/>
                 </a:solidFill>
               </a:rPr>
-              <a:t>•  Toggle the strategy active/inactive; the status is shown at the top.</a:t>
+              <a:t>•  A funding panel: amount raised vs goal, advance rate, fee and estimated return.</a:t>
             </a:r>
           </a:p>
           <a:p>
@@ -4172,7 +4175,7 @@
                   <a:srgbClr val="14231B"/>
                 </a:solidFill>
               </a:rPr>
-              <a:t>•  Rules are saved per investor and applied to matching new invoices.</a:t>
+              <a:t>•  A debtor-company profile lists registration number, sector, country and annual turnover.</a:t>
             </a:r>
           </a:p>
           <a:p>
@@ -4187,14 +4190,14 @@
                   <a:srgbClr val="14231B"/>
                 </a:solidFill>
               </a:rPr>
-              <a:t>•  Modelled on investly.co's autobidder.</a:t>
+              <a:t>•  Everything needed to make a funding decision on a single screen.</a:t>
             </a:r>
           </a:p>
         </p:txBody>
       </p:sp>
       <p:pic>
         <p:nvPicPr>
-          <p:cNvPr id="6" name="Picture 5" descr="en-12-auto-invest.png"/>
+          <p:cNvPr id="6" name="Picture 5" descr="en-09-marketplace-detail.png"/>
           <p:cNvPicPr>
             <a:picLocks noChangeAspect="1"/>
           </p:cNvPicPr>
@@ -4306,7 +4309,7 @@
                   <a:srgbClr val="C8A24B"/>
                 </a:solidFill>
               </a:rPr>
-              <a:t>AI · APPLICATION TRIAGE</a:t>
+              <a:t>INVESTOR APP · PORTFOLIO</a:t>
             </a:r>
           </a:p>
         </p:txBody>
@@ -4358,7 +4361,7 @@
                   <a:srgbClr val="FFFFFF"/>
                 </a:solidFill>
               </a:rPr>
-              <a:t>   Chat-based invoice triage</a:t>
+              <a:t>   The reporting cockpit</a:t>
             </a:r>
           </a:p>
         </p:txBody>
@@ -4396,7 +4399,7 @@
                   <a:srgbClr val="14231B"/>
                 </a:solidFill>
               </a:rPr>
-              <a:t>•  Sellers describe an invoice and debtor in plain language; the assistant collects only what is still missing.</a:t>
+              <a:t>•  Two hero panels: net annual return (interest received, write-offs, net income) and account value (active invested, expected outstanding, realized).</a:t>
             </a:r>
           </a:p>
           <a:p>
@@ -4411,7 +4414,7 @@
                   <a:srgbClr val="14231B"/>
                 </a:solidFill>
               </a:rPr>
-              <a:t>•  It returns an indicative risk band (A–D), an advance rate and the documents the bank needs next — in seconds, not days.</a:t>
+              <a:t>•  An investments aging table buckets active positions by days to / past due.</a:t>
             </a:r>
           </a:p>
           <a:p>
@@ -4426,7 +4429,7 @@
                   <a:srgbClr val="14231B"/>
                 </a:solidFill>
               </a:rPr>
-              <a:t>•  Powered by Grok (x.ai); everything is indicative and subject to verification — no final decision is automated.</a:t>
+              <a:t>•  A payment-habits table shows how settled invoices actually paid — early, on time, late or written off.</a:t>
             </a:r>
           </a:p>
           <a:p>
@@ -4441,14 +4444,14 @@
                   <a:srgbClr val="14231B"/>
                 </a:solidFill>
               </a:rPr>
-              <a:t>•  Fully trilingual — the assistant replies in the visitor's language (English, Oʻzbekcha, Russian).</a:t>
+              <a:t>•  A positions table lists every investment with realized return, settlement date, grade and status.</a:t>
             </a:r>
           </a:p>
         </p:txBody>
       </p:sp>
       <p:pic>
         <p:nvPicPr>
-          <p:cNvPr id="6" name="Picture 5" descr="en-13-ai-triage.png"/>
+          <p:cNvPr id="6" name="Picture 5" descr="en-10-portfolio.png"/>
           <p:cNvPicPr>
             <a:picLocks noChangeAspect="1"/>
           </p:cNvPicPr>
@@ -4560,7 +4563,7 @@
                   <a:srgbClr val="C8A24B"/>
                 </a:solidFill>
               </a:rPr>
-              <a:t>AI · PORTFOLIO REPORTING</a:t>
+              <a:t>INVESTOR APP · ACCOUNT STATEMENT</a:t>
             </a:r>
           </a:p>
         </p:txBody>
@@ -4612,7 +4615,7 @@
                   <a:srgbClr val="FFFFFF"/>
                 </a:solidFill>
               </a:rPr>
-              <a:t>   Ask your portfolio anything</a:t>
+              <a:t>   Every transaction, filterable</a:t>
             </a:r>
           </a:p>
         </p:txBody>
@@ -4650,7 +4653,7 @@
                   <a:srgbClr val="14231B"/>
                 </a:solidFill>
               </a:rPr>
-              <a:t>•  Investors ask questions in natural language — net return, exposure by sector or debtor, overdue positions, upcoming settlements.</a:t>
+              <a:t>•  A unified ledger of cash movements: investments out (−) and settlements in (+).</a:t>
             </a:r>
           </a:p>
           <a:p>
@@ -4665,7 +4668,7 @@
                   <a:srgbClr val="14231B"/>
                 </a:solidFill>
               </a:rPr>
-              <a:t>•  Answers are grounded in the investor's own live positions — every figure traces back to real portfolio data, not invented.</a:t>
+              <a:t>•  Filter by date range, type, counterparty, invoice number and minimum amount.</a:t>
             </a:r>
           </a:p>
           <a:p>
@@ -4680,7 +4683,7 @@
                   <a:srgbClr val="14231B"/>
                 </a:solidFill>
               </a:rPr>
-              <a:t>•  Concrete and specific: it quotes actual amounts and invoice numbers, and says so plainly when the data can't answer.</a:t>
+              <a:t>•  Signed amounts in UZS, newest first.</a:t>
             </a:r>
           </a:p>
           <a:p>
@@ -4695,14 +4698,14 @@
                   <a:srgbClr val="14231B"/>
                 </a:solidFill>
               </a:rPr>
-              <a:t>•  The conversational layer on top of the portfolio cockpit — reporting on demand, in the investor's language.</a:t>
+              <a:t>•  One-click CSV export for bookkeeping and reconciliation.</a:t>
             </a:r>
           </a:p>
         </p:txBody>
       </p:sp>
       <p:pic>
         <p:nvPicPr>
-          <p:cNvPr id="6" name="Picture 5" descr="en-14-ai-assistant.png"/>
+          <p:cNvPr id="6" name="Picture 5" descr="en-11-statement.png"/>
           <p:cNvPicPr>
             <a:picLocks noChangeAspect="1"/>
           </p:cNvPicPr>
@@ -4814,7 +4817,7 @@
                   <a:srgbClr val="C8A24B"/>
                 </a:solidFill>
               </a:rPr>
-              <a:t>GET STARTED</a:t>
+              <a:t>INVESTOR APP · AUTO-INVEST</a:t>
             </a:r>
           </a:p>
         </p:txBody>
@@ -4866,7 +4869,7 @@
                   <a:srgbClr val="FFFFFF"/>
                 </a:solidFill>
               </a:rPr>
-              <a:t>   Start with Factorio</a:t>
+              <a:t>   Set rules, invest automatically</a:t>
             </a:r>
           </a:p>
         </p:txBody>
@@ -4880,7 +4883,7 @@
         <p:spPr>
           <a:xfrm>
             <a:off x="640080" y="1828800"/>
-            <a:ext cx="10881360" cy="4572000"/>
+            <a:ext cx="5120640" cy="4572000"/>
           </a:xfrm>
           <a:prstGeom prst="rect">
             <a:avLst/>
@@ -4904,7 +4907,7 @@
                   <a:srgbClr val="14231B"/>
                 </a:solidFill>
               </a:rPr>
-              <a:t>•  Sellers — submit an invoice and get an offer in 1–3 working days.</a:t>
+              <a:t>•  Configure automated bidding: minimum risk grade, maximum amount per invoice and preferred sectors.</a:t>
             </a:r>
           </a:p>
           <a:p>
@@ -4919,7 +4922,7 @@
                   <a:srgbClr val="14231B"/>
                 </a:solidFill>
               </a:rPr>
-              <a:t>•  Investors — browse the marketplace, build a portfolio, automate with auto-invest.</a:t>
+              <a:t>•  Toggle the strategy active/inactive; the status is shown at the top.</a:t>
             </a:r>
           </a:p>
           <a:p>
@@ -4934,7 +4937,769 @@
                   <a:srgbClr val="14231B"/>
                 </a:solidFill>
               </a:rPr>
-              <a:t>•  Live at factorio.co.uk · hello@factorio.io</a:t>
+              <a:t>•  Rules are saved per investor and applied to matching new invoices.</a:t>
+            </a:r>
+          </a:p>
+          <a:p>
+            <a:pPr>
+              <a:spcAft>
+                <a:spcPts val="1000"/>
+              </a:spcAft>
+            </a:pPr>
+            <a:r>
+              <a:rPr sz="1500">
+                <a:solidFill>
+                  <a:srgbClr val="14231B"/>
+                </a:solidFill>
+              </a:rPr>
+              <a:t>•  Modelled on investly.co's autobidder.</a:t>
+            </a:r>
+          </a:p>
+        </p:txBody>
+      </p:sp>
+      <p:pic>
+        <p:nvPicPr>
+          <p:cNvPr id="6" name="Picture 5" descr="en-12-auto-invest.png"/>
+          <p:cNvPicPr>
+            <a:picLocks noChangeAspect="1"/>
+          </p:cNvPicPr>
+          <p:nvPr/>
+        </p:nvPicPr>
+        <p:blipFill>
+          <a:blip r:embed="rId2"/>
+          <a:stretch>
+            <a:fillRect/>
+          </a:stretch>
+        </p:blipFill>
+        <p:spPr>
+          <a:xfrm>
+            <a:off x="5943600" y="1828800"/>
+            <a:ext cx="5760720" cy="3600450"/>
+          </a:xfrm>
+          <a:prstGeom prst="rect">
+            <a:avLst/>
+          </a:prstGeom>
+        </p:spPr>
+      </p:pic>
+    </p:spTree>
+  </p:cSld>
+  <p:clrMapOvr>
+    <a:masterClrMapping/>
+  </p:clrMapOvr>
+</p:sld>
+</file>
+
+<file path=ppt/slides/slide17.xml><?xml version="1.0" encoding="utf-8"?>
+<p:sld xmlns:a="http://schemas.openxmlformats.org/drawingml/2006/main" xmlns:p="http://schemas.openxmlformats.org/presentationml/2006/main" xmlns:r="http://schemas.openxmlformats.org/officeDocument/2006/relationships">
+  <p:cSld>
+    <p:spTree>
+      <p:nvGrpSpPr>
+        <p:cNvPr id="1" name=""/>
+        <p:cNvGrpSpPr/>
+        <p:nvPr/>
+      </p:nvGrpSpPr>
+      <p:grpSpPr/>
+      <p:sp>
+        <p:nvSpPr>
+          <p:cNvPr id="2" name="Rectangle 1"/>
+          <p:cNvSpPr/>
+          <p:nvPr/>
+        </p:nvSpPr>
+        <p:spPr>
+          <a:xfrm>
+            <a:off x="0" y="0"/>
+            <a:ext cx="12191695" cy="6858000"/>
+          </a:xfrm>
+          <a:prstGeom prst="rect">
+            <a:avLst/>
+          </a:prstGeom>
+          <a:solidFill>
+            <a:srgbClr val="F7F6F1"/>
+          </a:solidFill>
+          <a:ln>
+            <a:noFill/>
+          </a:ln>
+          <a:effectLst/>
+        </p:spPr>
+        <p:style>
+          <a:lnRef idx="1">
+            <a:schemeClr val="accent1"/>
+          </a:lnRef>
+          <a:fillRef idx="3">
+            <a:schemeClr val="accent1"/>
+          </a:fillRef>
+          <a:effectRef idx="2">
+            <a:schemeClr val="accent1"/>
+          </a:effectRef>
+          <a:fontRef idx="minor">
+            <a:schemeClr val="lt1"/>
+          </a:fontRef>
+        </p:style>
+        <p:txBody>
+          <a:bodyPr rtlCol="0" anchor="ctr"/>
+          <a:lstStyle/>
+          <a:p>
+            <a:pPr algn="ctr"/>
+          </a:p>
+        </p:txBody>
+      </p:sp>
+      <p:sp>
+        <p:nvSpPr>
+          <p:cNvPr id="3" name="TextBox 2"/>
+          <p:cNvSpPr txBox="1"/>
+          <p:nvPr/>
+        </p:nvSpPr>
+        <p:spPr>
+          <a:xfrm>
+            <a:off x="640080" y="365760"/>
+            <a:ext cx="10972800" cy="365760"/>
+          </a:xfrm>
+          <a:prstGeom prst="rect">
+            <a:avLst/>
+          </a:prstGeom>
+          <a:noFill/>
+        </p:spPr>
+        <p:txBody>
+          <a:bodyPr wrap="square">
+            <a:spAutoFit/>
+          </a:bodyPr>
+          <a:lstStyle/>
+          <a:p>
+            <a:r>
+              <a:rPr sz="1100" b="1">
+                <a:solidFill>
+                  <a:srgbClr val="C8A24B"/>
+                </a:solidFill>
+              </a:rPr>
+              <a:t>AI · APPLICATION TRIAGE</a:t>
+            </a:r>
+          </a:p>
+        </p:txBody>
+      </p:sp>
+      <p:sp>
+        <p:nvSpPr>
+          <p:cNvPr id="4" name="Rectangle 3"/>
+          <p:cNvSpPr/>
+          <p:nvPr/>
+        </p:nvSpPr>
+        <p:spPr>
+          <a:xfrm>
+            <a:off x="640080" y="731520"/>
+            <a:ext cx="10881360" cy="777240"/>
+          </a:xfrm>
+          <a:prstGeom prst="rect">
+            <a:avLst/>
+          </a:prstGeom>
+          <a:solidFill>
+            <a:srgbClr val="1F5D43"/>
+          </a:solidFill>
+          <a:ln>
+            <a:noFill/>
+          </a:ln>
+          <a:effectLst/>
+        </p:spPr>
+        <p:style>
+          <a:lnRef idx="1">
+            <a:schemeClr val="accent1"/>
+          </a:lnRef>
+          <a:fillRef idx="3">
+            <a:schemeClr val="accent1"/>
+          </a:fillRef>
+          <a:effectRef idx="2">
+            <a:schemeClr val="accent1"/>
+          </a:effectRef>
+          <a:fontRef idx="minor">
+            <a:schemeClr val="lt1"/>
+          </a:fontRef>
+        </p:style>
+        <p:txBody>
+          <a:bodyPr rtlCol="0" anchor="ctr" wrap="square"/>
+          <a:lstStyle/>
+          <a:p>
+            <a:pPr algn="l"/>
+            <a:r>
+              <a:rPr sz="2200" b="1">
+                <a:solidFill>
+                  <a:srgbClr val="FFFFFF"/>
+                </a:solidFill>
+              </a:rPr>
+              <a:t>   Chat-based invoice triage</a:t>
+            </a:r>
+          </a:p>
+        </p:txBody>
+      </p:sp>
+      <p:sp>
+        <p:nvSpPr>
+          <p:cNvPr id="5" name="TextBox 4"/>
+          <p:cNvSpPr txBox="1"/>
+          <p:nvPr/>
+        </p:nvSpPr>
+        <p:spPr>
+          <a:xfrm>
+            <a:off x="640080" y="1828800"/>
+            <a:ext cx="5120640" cy="4572000"/>
+          </a:xfrm>
+          <a:prstGeom prst="rect">
+            <a:avLst/>
+          </a:prstGeom>
+          <a:noFill/>
+        </p:spPr>
+        <p:txBody>
+          <a:bodyPr wrap="square">
+            <a:spAutoFit/>
+          </a:bodyPr>
+          <a:lstStyle/>
+          <a:p>
+            <a:pPr>
+              <a:spcAft>
+                <a:spcPts val="1000"/>
+              </a:spcAft>
+            </a:pPr>
+            <a:r>
+              <a:rPr sz="1500">
+                <a:solidFill>
+                  <a:srgbClr val="14231B"/>
+                </a:solidFill>
+              </a:rPr>
+              <a:t>•  Sellers describe an invoice and debtor in plain language; the assistant collects only what is still missing.</a:t>
+            </a:r>
+          </a:p>
+          <a:p>
+            <a:pPr>
+              <a:spcAft>
+                <a:spcPts val="1000"/>
+              </a:spcAft>
+            </a:pPr>
+            <a:r>
+              <a:rPr sz="1500">
+                <a:solidFill>
+                  <a:srgbClr val="14231B"/>
+                </a:solidFill>
+              </a:rPr>
+              <a:t>•  It returns an indicative risk band (A–D), an advance rate and the documents the bank needs next — in seconds, not days.</a:t>
+            </a:r>
+          </a:p>
+          <a:p>
+            <a:pPr>
+              <a:spcAft>
+                <a:spcPts val="1000"/>
+              </a:spcAft>
+            </a:pPr>
+            <a:r>
+              <a:rPr sz="1500">
+                <a:solidFill>
+                  <a:srgbClr val="14231B"/>
+                </a:solidFill>
+              </a:rPr>
+              <a:t>•  Powered by Grok (x.ai); everything is indicative and subject to verification — no final decision is automated.</a:t>
+            </a:r>
+          </a:p>
+          <a:p>
+            <a:pPr>
+              <a:spcAft>
+                <a:spcPts val="1000"/>
+              </a:spcAft>
+            </a:pPr>
+            <a:r>
+              <a:rPr sz="1500">
+                <a:solidFill>
+                  <a:srgbClr val="14231B"/>
+                </a:solidFill>
+              </a:rPr>
+              <a:t>•  Fully trilingual — the assistant replies in the visitor's language (English, Oʻzbekcha, Russian).</a:t>
+            </a:r>
+          </a:p>
+        </p:txBody>
+      </p:sp>
+      <p:pic>
+        <p:nvPicPr>
+          <p:cNvPr id="6" name="Picture 5" descr="en-13-ai-triage.png"/>
+          <p:cNvPicPr>
+            <a:picLocks noChangeAspect="1"/>
+          </p:cNvPicPr>
+          <p:nvPr/>
+        </p:nvPicPr>
+        <p:blipFill>
+          <a:blip r:embed="rId2"/>
+          <a:stretch>
+            <a:fillRect/>
+          </a:stretch>
+        </p:blipFill>
+        <p:spPr>
+          <a:xfrm>
+            <a:off x="5943600" y="1828800"/>
+            <a:ext cx="5760720" cy="3600450"/>
+          </a:xfrm>
+          <a:prstGeom prst="rect">
+            <a:avLst/>
+          </a:prstGeom>
+        </p:spPr>
+      </p:pic>
+    </p:spTree>
+  </p:cSld>
+  <p:clrMapOvr>
+    <a:masterClrMapping/>
+  </p:clrMapOvr>
+</p:sld>
+</file>
+
+<file path=ppt/slides/slide18.xml><?xml version="1.0" encoding="utf-8"?>
+<p:sld xmlns:a="http://schemas.openxmlformats.org/drawingml/2006/main" xmlns:p="http://schemas.openxmlformats.org/presentationml/2006/main" xmlns:r="http://schemas.openxmlformats.org/officeDocument/2006/relationships">
+  <p:cSld>
+    <p:spTree>
+      <p:nvGrpSpPr>
+        <p:cNvPr id="1" name=""/>
+        <p:cNvGrpSpPr/>
+        <p:nvPr/>
+      </p:nvGrpSpPr>
+      <p:grpSpPr/>
+      <p:sp>
+        <p:nvSpPr>
+          <p:cNvPr id="2" name="Rectangle 1"/>
+          <p:cNvSpPr/>
+          <p:nvPr/>
+        </p:nvSpPr>
+        <p:spPr>
+          <a:xfrm>
+            <a:off x="0" y="0"/>
+            <a:ext cx="12191695" cy="6858000"/>
+          </a:xfrm>
+          <a:prstGeom prst="rect">
+            <a:avLst/>
+          </a:prstGeom>
+          <a:solidFill>
+            <a:srgbClr val="F7F6F1"/>
+          </a:solidFill>
+          <a:ln>
+            <a:noFill/>
+          </a:ln>
+          <a:effectLst/>
+        </p:spPr>
+        <p:style>
+          <a:lnRef idx="1">
+            <a:schemeClr val="accent1"/>
+          </a:lnRef>
+          <a:fillRef idx="3">
+            <a:schemeClr val="accent1"/>
+          </a:fillRef>
+          <a:effectRef idx="2">
+            <a:schemeClr val="accent1"/>
+          </a:effectRef>
+          <a:fontRef idx="minor">
+            <a:schemeClr val="lt1"/>
+          </a:fontRef>
+        </p:style>
+        <p:txBody>
+          <a:bodyPr rtlCol="0" anchor="ctr"/>
+          <a:lstStyle/>
+          <a:p>
+            <a:pPr algn="ctr"/>
+          </a:p>
+        </p:txBody>
+      </p:sp>
+      <p:sp>
+        <p:nvSpPr>
+          <p:cNvPr id="3" name="TextBox 2"/>
+          <p:cNvSpPr txBox="1"/>
+          <p:nvPr/>
+        </p:nvSpPr>
+        <p:spPr>
+          <a:xfrm>
+            <a:off x="640080" y="365760"/>
+            <a:ext cx="10972800" cy="365760"/>
+          </a:xfrm>
+          <a:prstGeom prst="rect">
+            <a:avLst/>
+          </a:prstGeom>
+          <a:noFill/>
+        </p:spPr>
+        <p:txBody>
+          <a:bodyPr wrap="square">
+            <a:spAutoFit/>
+          </a:bodyPr>
+          <a:lstStyle/>
+          <a:p>
+            <a:r>
+              <a:rPr sz="1100" b="1">
+                <a:solidFill>
+                  <a:srgbClr val="C8A24B"/>
+                </a:solidFill>
+              </a:rPr>
+              <a:t>AI · PORTFOLIO REPORTING</a:t>
+            </a:r>
+          </a:p>
+        </p:txBody>
+      </p:sp>
+      <p:sp>
+        <p:nvSpPr>
+          <p:cNvPr id="4" name="Rectangle 3"/>
+          <p:cNvSpPr/>
+          <p:nvPr/>
+        </p:nvSpPr>
+        <p:spPr>
+          <a:xfrm>
+            <a:off x="640080" y="731520"/>
+            <a:ext cx="10881360" cy="777240"/>
+          </a:xfrm>
+          <a:prstGeom prst="rect">
+            <a:avLst/>
+          </a:prstGeom>
+          <a:solidFill>
+            <a:srgbClr val="1F5D43"/>
+          </a:solidFill>
+          <a:ln>
+            <a:noFill/>
+          </a:ln>
+          <a:effectLst/>
+        </p:spPr>
+        <p:style>
+          <a:lnRef idx="1">
+            <a:schemeClr val="accent1"/>
+          </a:lnRef>
+          <a:fillRef idx="3">
+            <a:schemeClr val="accent1"/>
+          </a:fillRef>
+          <a:effectRef idx="2">
+            <a:schemeClr val="accent1"/>
+          </a:effectRef>
+          <a:fontRef idx="minor">
+            <a:schemeClr val="lt1"/>
+          </a:fontRef>
+        </p:style>
+        <p:txBody>
+          <a:bodyPr rtlCol="0" anchor="ctr" wrap="square"/>
+          <a:lstStyle/>
+          <a:p>
+            <a:pPr algn="l"/>
+            <a:r>
+              <a:rPr sz="2200" b="1">
+                <a:solidFill>
+                  <a:srgbClr val="FFFFFF"/>
+                </a:solidFill>
+              </a:rPr>
+              <a:t>   Ask your portfolio anything</a:t>
+            </a:r>
+          </a:p>
+        </p:txBody>
+      </p:sp>
+      <p:sp>
+        <p:nvSpPr>
+          <p:cNvPr id="5" name="TextBox 4"/>
+          <p:cNvSpPr txBox="1"/>
+          <p:nvPr/>
+        </p:nvSpPr>
+        <p:spPr>
+          <a:xfrm>
+            <a:off x="640080" y="1828800"/>
+            <a:ext cx="5120640" cy="4572000"/>
+          </a:xfrm>
+          <a:prstGeom prst="rect">
+            <a:avLst/>
+          </a:prstGeom>
+          <a:noFill/>
+        </p:spPr>
+        <p:txBody>
+          <a:bodyPr wrap="square">
+            <a:spAutoFit/>
+          </a:bodyPr>
+          <a:lstStyle/>
+          <a:p>
+            <a:pPr>
+              <a:spcAft>
+                <a:spcPts val="1000"/>
+              </a:spcAft>
+            </a:pPr>
+            <a:r>
+              <a:rPr sz="1500">
+                <a:solidFill>
+                  <a:srgbClr val="14231B"/>
+                </a:solidFill>
+              </a:rPr>
+              <a:t>•  Investors ask questions in natural language — net return, exposure by sector or debtor, overdue positions, upcoming settlements.</a:t>
+            </a:r>
+          </a:p>
+          <a:p>
+            <a:pPr>
+              <a:spcAft>
+                <a:spcPts val="1000"/>
+              </a:spcAft>
+            </a:pPr>
+            <a:r>
+              <a:rPr sz="1500">
+                <a:solidFill>
+                  <a:srgbClr val="14231B"/>
+                </a:solidFill>
+              </a:rPr>
+              <a:t>•  Answers are grounded in the investor's own live positions — every figure traces back to real portfolio data, not invented.</a:t>
+            </a:r>
+          </a:p>
+          <a:p>
+            <a:pPr>
+              <a:spcAft>
+                <a:spcPts val="1000"/>
+              </a:spcAft>
+            </a:pPr>
+            <a:r>
+              <a:rPr sz="1500">
+                <a:solidFill>
+                  <a:srgbClr val="14231B"/>
+                </a:solidFill>
+              </a:rPr>
+              <a:t>•  Concrete and specific: it quotes actual amounts and invoice numbers, and says so plainly when the data can't answer.</a:t>
+            </a:r>
+          </a:p>
+          <a:p>
+            <a:pPr>
+              <a:spcAft>
+                <a:spcPts val="1000"/>
+              </a:spcAft>
+            </a:pPr>
+            <a:r>
+              <a:rPr sz="1500">
+                <a:solidFill>
+                  <a:srgbClr val="14231B"/>
+                </a:solidFill>
+              </a:rPr>
+              <a:t>•  The conversational layer on top of the portfolio cockpit — reporting on demand, in the investor's language.</a:t>
+            </a:r>
+          </a:p>
+        </p:txBody>
+      </p:sp>
+      <p:pic>
+        <p:nvPicPr>
+          <p:cNvPr id="6" name="Picture 5" descr="en-14-ai-assistant.png"/>
+          <p:cNvPicPr>
+            <a:picLocks noChangeAspect="1"/>
+          </p:cNvPicPr>
+          <p:nvPr/>
+        </p:nvPicPr>
+        <p:blipFill>
+          <a:blip r:embed="rId2"/>
+          <a:stretch>
+            <a:fillRect/>
+          </a:stretch>
+        </p:blipFill>
+        <p:spPr>
+          <a:xfrm>
+            <a:off x="5943600" y="1828800"/>
+            <a:ext cx="5760720" cy="3600450"/>
+          </a:xfrm>
+          <a:prstGeom prst="rect">
+            <a:avLst/>
+          </a:prstGeom>
+        </p:spPr>
+      </p:pic>
+    </p:spTree>
+  </p:cSld>
+  <p:clrMapOvr>
+    <a:masterClrMapping/>
+  </p:clrMapOvr>
+</p:sld>
+</file>
+
+<file path=ppt/slides/slide19.xml><?xml version="1.0" encoding="utf-8"?>
+<p:sld xmlns:a="http://schemas.openxmlformats.org/drawingml/2006/main" xmlns:p="http://schemas.openxmlformats.org/presentationml/2006/main" xmlns:r="http://schemas.openxmlformats.org/officeDocument/2006/relationships">
+  <p:cSld>
+    <p:spTree>
+      <p:nvGrpSpPr>
+        <p:cNvPr id="1" name=""/>
+        <p:cNvGrpSpPr/>
+        <p:nvPr/>
+      </p:nvGrpSpPr>
+      <p:grpSpPr/>
+      <p:sp>
+        <p:nvSpPr>
+          <p:cNvPr id="2" name="Rectangle 1"/>
+          <p:cNvSpPr/>
+          <p:nvPr/>
+        </p:nvSpPr>
+        <p:spPr>
+          <a:xfrm>
+            <a:off x="0" y="0"/>
+            <a:ext cx="12191695" cy="6858000"/>
+          </a:xfrm>
+          <a:prstGeom prst="rect">
+            <a:avLst/>
+          </a:prstGeom>
+          <a:solidFill>
+            <a:srgbClr val="F7F6F1"/>
+          </a:solidFill>
+          <a:ln>
+            <a:noFill/>
+          </a:ln>
+          <a:effectLst/>
+        </p:spPr>
+        <p:style>
+          <a:lnRef idx="1">
+            <a:schemeClr val="accent1"/>
+          </a:lnRef>
+          <a:fillRef idx="3">
+            <a:schemeClr val="accent1"/>
+          </a:fillRef>
+          <a:effectRef idx="2">
+            <a:schemeClr val="accent1"/>
+          </a:effectRef>
+          <a:fontRef idx="minor">
+            <a:schemeClr val="lt1"/>
+          </a:fontRef>
+        </p:style>
+        <p:txBody>
+          <a:bodyPr rtlCol="0" anchor="ctr"/>
+          <a:lstStyle/>
+          <a:p>
+            <a:pPr algn="ctr"/>
+          </a:p>
+        </p:txBody>
+      </p:sp>
+      <p:sp>
+        <p:nvSpPr>
+          <p:cNvPr id="3" name="TextBox 2"/>
+          <p:cNvSpPr txBox="1"/>
+          <p:nvPr/>
+        </p:nvSpPr>
+        <p:spPr>
+          <a:xfrm>
+            <a:off x="640080" y="365760"/>
+            <a:ext cx="10972800" cy="365760"/>
+          </a:xfrm>
+          <a:prstGeom prst="rect">
+            <a:avLst/>
+          </a:prstGeom>
+          <a:noFill/>
+        </p:spPr>
+        <p:txBody>
+          <a:bodyPr wrap="square">
+            <a:spAutoFit/>
+          </a:bodyPr>
+          <a:lstStyle/>
+          <a:p>
+            <a:r>
+              <a:rPr sz="1100" b="1">
+                <a:solidFill>
+                  <a:srgbClr val="C8A24B"/>
+                </a:solidFill>
+              </a:rPr>
+              <a:t>GET STARTED</a:t>
+            </a:r>
+          </a:p>
+        </p:txBody>
+      </p:sp>
+      <p:sp>
+        <p:nvSpPr>
+          <p:cNvPr id="4" name="Rectangle 3"/>
+          <p:cNvSpPr/>
+          <p:nvPr/>
+        </p:nvSpPr>
+        <p:spPr>
+          <a:xfrm>
+            <a:off x="640080" y="731520"/>
+            <a:ext cx="10881360" cy="777240"/>
+          </a:xfrm>
+          <a:prstGeom prst="rect">
+            <a:avLst/>
+          </a:prstGeom>
+          <a:solidFill>
+            <a:srgbClr val="1F5D43"/>
+          </a:solidFill>
+          <a:ln>
+            <a:noFill/>
+          </a:ln>
+          <a:effectLst/>
+        </p:spPr>
+        <p:style>
+          <a:lnRef idx="1">
+            <a:schemeClr val="accent1"/>
+          </a:lnRef>
+          <a:fillRef idx="3">
+            <a:schemeClr val="accent1"/>
+          </a:fillRef>
+          <a:effectRef idx="2">
+            <a:schemeClr val="accent1"/>
+          </a:effectRef>
+          <a:fontRef idx="minor">
+            <a:schemeClr val="lt1"/>
+          </a:fontRef>
+        </p:style>
+        <p:txBody>
+          <a:bodyPr rtlCol="0" anchor="ctr" wrap="square"/>
+          <a:lstStyle/>
+          <a:p>
+            <a:pPr algn="l"/>
+            <a:r>
+              <a:rPr sz="2200" b="1">
+                <a:solidFill>
+                  <a:srgbClr val="FFFFFF"/>
+                </a:solidFill>
+              </a:rPr>
+              <a:t>   Start with Factorio</a:t>
+            </a:r>
+          </a:p>
+        </p:txBody>
+      </p:sp>
+      <p:sp>
+        <p:nvSpPr>
+          <p:cNvPr id="5" name="TextBox 4"/>
+          <p:cNvSpPr txBox="1"/>
+          <p:nvPr/>
+        </p:nvSpPr>
+        <p:spPr>
+          <a:xfrm>
+            <a:off x="640080" y="1828800"/>
+            <a:ext cx="10881360" cy="4572000"/>
+          </a:xfrm>
+          <a:prstGeom prst="rect">
+            <a:avLst/>
+          </a:prstGeom>
+          <a:noFill/>
+        </p:spPr>
+        <p:txBody>
+          <a:bodyPr wrap="square">
+            <a:spAutoFit/>
+          </a:bodyPr>
+          <a:lstStyle/>
+          <a:p>
+            <a:pPr>
+              <a:spcAft>
+                <a:spcPts val="1000"/>
+              </a:spcAft>
+            </a:pPr>
+            <a:r>
+              <a:rPr sz="1500">
+                <a:solidFill>
+                  <a:srgbClr val="14231B"/>
+                </a:solidFill>
+              </a:rPr>
+              <a:t>•  Sellers — submit an invoice and get an offer in 1–3 working days.</a:t>
+            </a:r>
+          </a:p>
+          <a:p>
+            <a:pPr>
+              <a:spcAft>
+                <a:spcPts val="1000"/>
+              </a:spcAft>
+            </a:pPr>
+            <a:r>
+              <a:rPr sz="1500">
+                <a:solidFill>
+                  <a:srgbClr val="14231B"/>
+                </a:solidFill>
+              </a:rPr>
+              <a:t>•  Investors — browse the marketplace, build a portfolio, automate with auto-invest.</a:t>
+            </a:r>
+          </a:p>
+          <a:p>
+            <a:pPr>
+              <a:spcAft>
+                <a:spcPts val="1000"/>
+              </a:spcAft>
+            </a:pPr>
+            <a:r>
+              <a:rPr sz="1500">
+                <a:solidFill>
+                  <a:srgbClr val="14231B"/>
+                </a:solidFill>
+              </a:rPr>
+              <a:t>•  Live at factorio.co.uk · hello@factorio.co.uk</a:t>
             </a:r>
           </a:p>
         </p:txBody>
@@ -6045,7 +6810,7 @@
                   <a:srgbClr val="C8A24B"/>
                 </a:solidFill>
               </a:rPr>
-              <a:t>PRICING</a:t>
+              <a:t>HOW THE MONEY MOVES</a:t>
             </a:r>
           </a:p>
         </p:txBody>
@@ -6097,97 +6862,14 @@
                   <a:srgbClr val="FFFFFF"/>
                 </a:solidFill>
               </a:rPr>
-              <a:t>   Transparent, per-invoice fees</a:t>
-            </a:r>
-          </a:p>
-        </p:txBody>
-      </p:sp>
-      <p:sp>
-        <p:nvSpPr>
-          <p:cNvPr id="5" name="TextBox 4"/>
-          <p:cNvSpPr txBox="1"/>
-          <p:nvPr/>
-        </p:nvSpPr>
-        <p:spPr>
-          <a:xfrm>
-            <a:off x="640080" y="1828800"/>
-            <a:ext cx="5120640" cy="4572000"/>
-          </a:xfrm>
-          <a:prstGeom prst="rect">
-            <a:avLst/>
-          </a:prstGeom>
-          <a:noFill/>
-        </p:spPr>
-        <p:txBody>
-          <a:bodyPr wrap="square">
-            <a:spAutoFit/>
-          </a:bodyPr>
-          <a:lstStyle/>
-          <a:p>
-            <a:pPr>
-              <a:spcAft>
-                <a:spcPts val="1000"/>
-              </a:spcAft>
-            </a:pPr>
-            <a:r>
-              <a:rPr sz="1500">
-                <a:solidFill>
-                  <a:srgbClr val="14231B"/>
-                </a:solidFill>
-              </a:rPr>
-              <a:t>•  Pricing is per invoice — a fee per 30 days against the advanced amount, with no hidden charges.</a:t>
-            </a:r>
-          </a:p>
-          <a:p>
-            <a:pPr>
-              <a:spcAft>
-                <a:spcPts val="1000"/>
-              </a:spcAft>
-            </a:pPr>
-            <a:r>
-              <a:rPr sz="1500">
-                <a:solidFill>
-                  <a:srgbClr val="14231B"/>
-                </a:solidFill>
-              </a:rPr>
-              <a:t>•  Shows the headline advance rate and worked example economics.</a:t>
-            </a:r>
-          </a:p>
-          <a:p>
-            <a:pPr>
-              <a:spcAft>
-                <a:spcPts val="1000"/>
-              </a:spcAft>
-            </a:pPr>
-            <a:r>
-              <a:rPr sz="1500">
-                <a:solidFill>
-                  <a:srgbClr val="14231B"/>
-                </a:solidFill>
-              </a:rPr>
-              <a:t>•  No subscription and no commitment to submit an invoice.</a:t>
-            </a:r>
-          </a:p>
-          <a:p>
-            <a:pPr>
-              <a:spcAft>
-                <a:spcPts val="1000"/>
-              </a:spcAft>
-            </a:pPr>
-            <a:r>
-              <a:rPr sz="1500">
-                <a:solidFill>
-                  <a:srgbClr val="14231B"/>
-                </a:solidFill>
-              </a:rPr>
-              <a:t>•  A clear breakdown so both sides understand the return and the cost.</a:t>
+              <a:t>   Where every party's money comes from</a:t>
             </a:r>
           </a:p>
         </p:txBody>
       </p:sp>
       <p:pic>
         <p:nvPicPr>
-          <p:cNvPr id="6" name="Picture 5" descr="en-05-pricing.png"/>
+          <p:cNvPr id="5" name="Picture 4" descr="en-15-money-flow.png"/>
           <p:cNvPicPr>
             <a:picLocks noChangeAspect="1"/>
           </p:cNvPicPr>
@@ -6201,14 +6883,97 @@
         </p:blipFill>
         <p:spPr>
           <a:xfrm>
-            <a:off x="5943600" y="1828800"/>
-            <a:ext cx="5760720" cy="3600450"/>
+            <a:off x="1527048" y="1737360"/>
+            <a:ext cx="9144000" cy="2155697"/>
           </a:xfrm>
           <a:prstGeom prst="rect">
             <a:avLst/>
           </a:prstGeom>
         </p:spPr>
       </p:pic>
+      <p:sp>
+        <p:nvSpPr>
+          <p:cNvPr id="6" name="TextBox 5"/>
+          <p:cNvSpPr txBox="1"/>
+          <p:nvPr/>
+        </p:nvSpPr>
+        <p:spPr>
+          <a:xfrm>
+            <a:off x="640080" y="4663440"/>
+            <a:ext cx="10881360" cy="2011680"/>
+          </a:xfrm>
+          <a:prstGeom prst="rect">
+            <a:avLst/>
+          </a:prstGeom>
+          <a:noFill/>
+        </p:spPr>
+        <p:txBody>
+          <a:bodyPr wrap="square">
+            <a:spAutoFit/>
+          </a:bodyPr>
+          <a:lstStyle/>
+          <a:p>
+            <a:pPr>
+              <a:spcAft>
+                <a:spcPts val="600"/>
+              </a:spcAft>
+            </a:pPr>
+            <a:r>
+              <a:rPr sz="1300">
+                <a:solidFill>
+                  <a:srgbClr val="14231B"/>
+                </a:solidFill>
+              </a:rPr>
+              <a:t>•  The seller delivers goods and issues a SoliqOnline e-invoice; the payer (debtor) owes the invoice amount.</a:t>
+            </a:r>
+          </a:p>
+          <a:p>
+            <a:pPr>
+              <a:spcAft>
+                <a:spcPts val="600"/>
+              </a:spcAft>
+            </a:pPr>
+            <a:r>
+              <a:rPr sz="1300">
+                <a:solidFill>
+                  <a:srgbClr val="14231B"/>
+                </a:solidFill>
+              </a:rPr>
+              <a:t>•  The platform advances ~85% to the seller now, funded by the capital source — the bank's balance sheet, investors, or the DIFC SPV.</a:t>
+            </a:r>
+          </a:p>
+          <a:p>
+            <a:pPr>
+              <a:spcAft>
+                <a:spcPts val="600"/>
+              </a:spcAft>
+            </a:pPr>
+            <a:r>
+              <a:rPr sz="1300">
+                <a:solidFill>
+                  <a:srgbClr val="14231B"/>
+                </a:solidFill>
+              </a:rPr>
+              <a:t>•  At maturity the payer pays 100% into the collection account; the seller receives the net balance, the capital source gets principal + return, and the platform keeps a volume-based fee.</a:t>
+            </a:r>
+          </a:p>
+          <a:p>
+            <a:pPr>
+              <a:spcAft>
+                <a:spcPts val="600"/>
+              </a:spcAft>
+            </a:pPr>
+            <a:r>
+              <a:rPr sz="1300">
+                <a:solidFill>
+                  <a:srgbClr val="14231B"/>
+                </a:solidFill>
+              </a:rPr>
+              <a:t>•  The flow is identical whoever funds it — which is what makes the investor / SPV layer pluggable.</a:t>
+            </a:r>
+          </a:p>
+        </p:txBody>
+      </p:sp>
     </p:spTree>
   </p:cSld>
   <p:clrMapOvr>
@@ -6299,7 +7064,7 @@
                   <a:srgbClr val="C8A24B"/>
                 </a:solidFill>
               </a:rPr>
-              <a:t>CONTACT</a:t>
+              <a:t>JOURNEY · BORROWER (ORIGINATION)</a:t>
             </a:r>
           </a:p>
         </p:txBody>
@@ -6351,82 +7116,14 @@
                   <a:srgbClr val="FFFFFF"/>
                 </a:solidFill>
               </a:rPr>
-              <a:t>   Get in touch</a:t>
-            </a:r>
-          </a:p>
-        </p:txBody>
-      </p:sp>
-      <p:sp>
-        <p:nvSpPr>
-          <p:cNvPr id="5" name="TextBox 4"/>
-          <p:cNvSpPr txBox="1"/>
-          <p:nvPr/>
-        </p:nvSpPr>
-        <p:spPr>
-          <a:xfrm>
-            <a:off x="640080" y="1828800"/>
-            <a:ext cx="5120640" cy="4572000"/>
-          </a:xfrm>
-          <a:prstGeom prst="rect">
-            <a:avLst/>
-          </a:prstGeom>
-          <a:noFill/>
-        </p:spPr>
-        <p:txBody>
-          <a:bodyPr wrap="square">
-            <a:spAutoFit/>
-          </a:bodyPr>
-          <a:lstStyle/>
-          <a:p>
-            <a:pPr>
-              <a:spcAft>
-                <a:spcPts val="1000"/>
-              </a:spcAft>
-            </a:pPr>
-            <a:r>
-              <a:rPr sz="1500">
-                <a:solidFill>
-                  <a:srgbClr val="14231B"/>
-                </a:solidFill>
-              </a:rPr>
-              <a:t>•  A contact page for sellers and investors to reach the Factorio team.</a:t>
-            </a:r>
-          </a:p>
-          <a:p>
-            <a:pPr>
-              <a:spcAft>
-                <a:spcPts val="1000"/>
-              </a:spcAft>
-            </a:pPr>
-            <a:r>
-              <a:rPr sz="1500">
-                <a:solidFill>
-                  <a:srgbClr val="14231B"/>
-                </a:solidFill>
-              </a:rPr>
-              <a:t>•  Shows the contact email and a simple enquiry form.</a:t>
-            </a:r>
-          </a:p>
-          <a:p>
-            <a:pPr>
-              <a:spcAft>
-                <a:spcPts val="1000"/>
-              </a:spcAft>
-            </a:pPr>
-            <a:r>
-              <a:rPr sz="1500">
-                <a:solidFill>
-                  <a:srgbClr val="14231B"/>
-                </a:solidFill>
-              </a:rPr>
-              <a:t>•  The entry point to start onboarding.</a:t>
+              <a:t>   The seller's journey, end to end</a:t>
             </a:r>
           </a:p>
         </p:txBody>
       </p:sp>
       <p:pic>
         <p:nvPicPr>
-          <p:cNvPr id="6" name="Picture 5" descr="en-06-contact.png"/>
+          <p:cNvPr id="5" name="Picture 4" descr="en-16-origination-journey.png"/>
           <p:cNvPicPr>
             <a:picLocks noChangeAspect="1"/>
           </p:cNvPicPr>
@@ -6440,14 +7137,82 @@
         </p:blipFill>
         <p:spPr>
           <a:xfrm>
-            <a:off x="5943600" y="1828800"/>
-            <a:ext cx="5760720" cy="3600450"/>
+            <a:off x="1527048" y="1737360"/>
+            <a:ext cx="9144000" cy="537210"/>
           </a:xfrm>
           <a:prstGeom prst="rect">
             <a:avLst/>
           </a:prstGeom>
         </p:spPr>
       </p:pic>
+      <p:sp>
+        <p:nvSpPr>
+          <p:cNvPr id="6" name="TextBox 5"/>
+          <p:cNvSpPr txBox="1"/>
+          <p:nvPr/>
+        </p:nvSpPr>
+        <p:spPr>
+          <a:xfrm>
+            <a:off x="640080" y="4663440"/>
+            <a:ext cx="10881360" cy="2011680"/>
+          </a:xfrm>
+          <a:prstGeom prst="rect">
+            <a:avLst/>
+          </a:prstGeom>
+          <a:noFill/>
+        </p:spPr>
+        <p:txBody>
+          <a:bodyPr wrap="square">
+            <a:spAutoFit/>
+          </a:bodyPr>
+          <a:lstStyle/>
+          <a:p>
+            <a:pPr>
+              <a:spcAft>
+                <a:spcPts val="600"/>
+              </a:spcAft>
+            </a:pPr>
+            <a:r>
+              <a:rPr sz="1300">
+                <a:solidFill>
+                  <a:srgbClr val="14231B"/>
+                </a:solidFill>
+              </a:rPr>
+              <a:t>•  Sign up (bank KYC) → invoice auto-imported from SoliqOnline → request financing in an AI-triage chat.</a:t>
+            </a:r>
+          </a:p>
+          <a:p>
+            <a:pPr>
+              <a:spcAft>
+                <a:spcPts val="600"/>
+              </a:spcAft>
+            </a:pPr>
+            <a:r>
+              <a:rPr sz="1300">
+                <a:solidFill>
+                  <a:srgbClr val="14231B"/>
+                </a:solidFill>
+              </a:rPr>
+              <a:t>•  Debtor scoring returns indicative terms; the bank approves in one click; collateral is registered with the CBU in under an hour.</a:t>
+            </a:r>
+          </a:p>
+          <a:p>
+            <a:pPr>
+              <a:spcAft>
+                <a:spcPts val="600"/>
+              </a:spcAft>
+            </a:pPr>
+            <a:r>
+              <a:rPr sz="1300">
+                <a:solidFill>
+                  <a:srgbClr val="14231B"/>
+                </a:solidFill>
+              </a:rPr>
+              <a:t>•  The advance lands in the seller's account in 24–48 hours — no branch visit, no paper.</a:t>
+            </a:r>
+          </a:p>
+        </p:txBody>
+      </p:sp>
     </p:spTree>
   </p:cSld>
   <p:clrMapOvr>
@@ -6538,7 +7303,7 @@
                   <a:srgbClr val="C8A24B"/>
                 </a:solidFill>
               </a:rPr>
-              <a:t>INVESTOR APP · DASHBOARD</a:t>
+              <a:t>JOURNEY · INVESTOR</a:t>
             </a:r>
           </a:p>
         </p:txBody>
@@ -6590,112 +7355,14 @@
                   <a:srgbClr val="FFFFFF"/>
                 </a:solidFill>
               </a:rPr>
-              <a:t>   Your personalized overview</a:t>
-            </a:r>
-          </a:p>
-        </p:txBody>
-      </p:sp>
-      <p:sp>
-        <p:nvSpPr>
-          <p:cNvPr id="5" name="TextBox 4"/>
-          <p:cNvSpPr txBox="1"/>
-          <p:nvPr/>
-        </p:nvSpPr>
-        <p:spPr>
-          <a:xfrm>
-            <a:off x="640080" y="1828800"/>
-            <a:ext cx="5120640" cy="4572000"/>
-          </a:xfrm>
-          <a:prstGeom prst="rect">
-            <a:avLst/>
-          </a:prstGeom>
-          <a:noFill/>
-        </p:spPr>
-        <p:txBody>
-          <a:bodyPr wrap="square">
-            <a:spAutoFit/>
-          </a:bodyPr>
-          <a:lstStyle/>
-          <a:p>
-            <a:pPr>
-              <a:spcAft>
-                <a:spcPts val="1000"/>
-              </a:spcAft>
-            </a:pPr>
-            <a:r>
-              <a:rPr sz="1500">
-                <a:solidFill>
-                  <a:srgbClr val="14231B"/>
-                </a:solidFill>
-              </a:rPr>
-              <a:t>•  The /app home greets the current investor and leads with their own KPIs: portfolio value, net annual return, earned-to-date and the next settlement.</a:t>
-            </a:r>
-          </a:p>
-          <a:p>
-            <a:pPr>
-              <a:spcAft>
-                <a:spcPts val="1000"/>
-              </a:spcAft>
-            </a:pPr>
-            <a:r>
-              <a:rPr sz="1500">
-                <a:solidFill>
-                  <a:srgbClr val="14231B"/>
-                </a:solidFill>
-              </a:rPr>
-              <a:t>•  A recent-activity feed surfaces notifications — fundings, settlements and updates.</a:t>
-            </a:r>
-          </a:p>
-          <a:p>
-            <a:pPr>
-              <a:spcAft>
-                <a:spcPts val="1000"/>
-              </a:spcAft>
-            </a:pPr>
-            <a:r>
-              <a:rPr sz="1500">
-                <a:solidFill>
-                  <a:srgbClr val="14231B"/>
-                </a:solidFill>
-              </a:rPr>
-              <a:t>•  Quick actions jump to the marketplace, portfolio and statement.</a:t>
-            </a:r>
-          </a:p>
-          <a:p>
-            <a:pPr>
-              <a:spcAft>
-                <a:spcPts val="1000"/>
-              </a:spcAft>
-            </a:pPr>
-            <a:r>
-              <a:rPr sz="1500">
-                <a:solidFill>
-                  <a:srgbClr val="14231B"/>
-                </a:solidFill>
-              </a:rPr>
-              <a:t>•  Platform-wide stats are kept as a secondary strip.</a:t>
-            </a:r>
-          </a:p>
-          <a:p>
-            <a:pPr>
-              <a:spcAft>
-                <a:spcPts val="1000"/>
-              </a:spcAft>
-            </a:pPr>
-            <a:r>
-              <a:rPr sz="1500">
-                <a:solidFill>
-                  <a:srgbClr val="14231B"/>
-                </a:solidFill>
-              </a:rPr>
-              <a:t>•  Top-right investor switcher lets you view the app as any investor (demo, no password).</a:t>
+              <a:t>   The investor's journey, end to end</a:t>
             </a:r>
           </a:p>
         </p:txBody>
       </p:sp>
       <p:pic>
         <p:nvPicPr>
-          <p:cNvPr id="6" name="Picture 5" descr="en-07-dashboard.png"/>
+          <p:cNvPr id="5" name="Picture 4" descr="en-17-investor-journey.png"/>
           <p:cNvPicPr>
             <a:picLocks noChangeAspect="1"/>
           </p:cNvPicPr>
@@ -6709,14 +7376,82 @@
         </p:blipFill>
         <p:spPr>
           <a:xfrm>
-            <a:off x="5943600" y="1828800"/>
-            <a:ext cx="5760720" cy="3600450"/>
+            <a:off x="1527048" y="1737360"/>
+            <a:ext cx="9144000" cy="617039"/>
           </a:xfrm>
           <a:prstGeom prst="rect">
             <a:avLst/>
           </a:prstGeom>
         </p:spPr>
       </p:pic>
+      <p:sp>
+        <p:nvSpPr>
+          <p:cNvPr id="6" name="TextBox 5"/>
+          <p:cNvSpPr txBox="1"/>
+          <p:nvPr/>
+        </p:nvSpPr>
+        <p:spPr>
+          <a:xfrm>
+            <a:off x="640080" y="4663440"/>
+            <a:ext cx="10881360" cy="2011680"/>
+          </a:xfrm>
+          <a:prstGeom prst="rect">
+            <a:avLst/>
+          </a:prstGeom>
+          <a:noFill/>
+        </p:spPr>
+        <p:txBody>
+          <a:bodyPr wrap="square">
+            <a:spAutoFit/>
+          </a:bodyPr>
+          <a:lstStyle/>
+          <a:p>
+            <a:pPr>
+              <a:spcAft>
+                <a:spcPts val="600"/>
+              </a:spcAft>
+            </a:pPr>
+            <a:r>
+              <a:rPr sz="1300">
+                <a:solidFill>
+                  <a:srgbClr val="14231B"/>
+                </a:solidFill>
+              </a:rPr>
+              <a:t>•  Onboard (KYC / accreditation) → commit capital via the marketplace or the SPV → auto-invest or pick invoices.</a:t>
+            </a:r>
+          </a:p>
+          <a:p>
+            <a:pPr>
+              <a:spcAft>
+                <a:spcPts val="600"/>
+              </a:spcAft>
+            </a:pPr>
+            <a:r>
+              <a:rPr sz="1300">
+                <a:solidFill>
+                  <a:srgbClr val="14231B"/>
+                </a:solidFill>
+              </a:rPr>
+              <a:t>•  Hold the position with AI portfolio reporting on demand; when the debtor pays at maturity, principal + return are distributed.</a:t>
+            </a:r>
+          </a:p>
+          <a:p>
+            <a:pPr>
+              <a:spcAft>
+                <a:spcPts val="600"/>
+              </a:spcAft>
+            </a:pPr>
+            <a:r>
+              <a:rPr sz="1300">
+                <a:solidFill>
+                  <a:srgbClr val="14231B"/>
+                </a:solidFill>
+              </a:rPr>
+              <a:t>•  Decomposable: the origination piece (bank-funded) can launch first; the investor marketplace and SPV plug in later, independently.</a:t>
+            </a:r>
+          </a:p>
+        </p:txBody>
+      </p:sp>
     </p:spTree>
   </p:cSld>
   <p:clrMapOvr>
@@ -6807,7 +7542,7 @@
                   <a:srgbClr val="C8A24B"/>
                 </a:solidFill>
               </a:rPr>
-              <a:t>INVESTOR APP · MARKETPLACE</a:t>
+              <a:t>PRICING</a:t>
             </a:r>
           </a:p>
         </p:txBody>
@@ -6859,7 +7594,7 @@
                   <a:srgbClr val="FFFFFF"/>
                 </a:solidFill>
               </a:rPr>
-              <a:t>   Browse fundable invoices</a:t>
+              <a:t>   Transparent, per-invoice fees</a:t>
             </a:r>
           </a:p>
         </p:txBody>
@@ -6897,7 +7632,7 @@
                   <a:srgbClr val="14231B"/>
                 </a:solidFill>
               </a:rPr>
-              <a:t>•  Every open, fundable invoice is a card: debtor, sector, risk grade, amount and a live funding-progress bar.</a:t>
+              <a:t>•  Pricing is per invoice — a fee per 30 days against the advanced amount, with no hidden charges.</a:t>
             </a:r>
           </a:p>
           <a:p>
@@ -6912,7 +7647,7 @@
                   <a:srgbClr val="14231B"/>
                 </a:solidFill>
               </a:rPr>
-              <a:t>•  Each card shows the key economics — advance rate, fee per 30 days and estimated return — plus the target hold in days.</a:t>
+              <a:t>•  Shows the headline advance rate and worked example economics.</a:t>
             </a:r>
           </a:p>
           <a:p>
@@ -6927,7 +7662,7 @@
                   <a:srgbClr val="14231B"/>
                 </a:solidFill>
               </a:rPr>
-              <a:t>•  The filter bar narrows by sector, risk grade, maximum term and minimum return.</a:t>
+              <a:t>•  No subscription and no commitment to submit an invoice.</a:t>
             </a:r>
           </a:p>
           <a:p>
@@ -6942,14 +7677,14 @@
                   <a:srgbClr val="14231B"/>
                 </a:solidFill>
               </a:rPr>
-              <a:t>•  Click a card to open the full invoice detail.</a:t>
+              <a:t>•  A clear breakdown so both sides understand the return and the cost.</a:t>
             </a:r>
           </a:p>
         </p:txBody>
       </p:sp>
       <p:pic>
         <p:nvPicPr>
-          <p:cNvPr id="6" name="Picture 5" descr="en-08-marketplace.png"/>
+          <p:cNvPr id="6" name="Picture 5" descr="en-05-pricing.png"/>
           <p:cNvPicPr>
             <a:picLocks noChangeAspect="1"/>
           </p:cNvPicPr>
